--- a/ppt/实验：验证动量守恒定律.pptx
+++ b/ppt/实验：验证动量守恒定律.pptx
@@ -5,9 +5,7 @@
     <p:sldMasterId id="2147483648" r:id="rId1"/>
   </p:sldMasterIdLst>
   <p:sldIdLst>
-    <p:sldId id="256" r:id="rId2"/>
-    <p:sldId id="258" r:id="rId3"/>
-    <p:sldId id="314" r:id="rId4"/>
+    <p:sldId id="314" r:id="rId2"/>
   </p:sldIdLst>
   <p:sldSz cx="12192000" cy="6858000"/>
   <p:notesSz cx="6858000" cy="9144000"/>
@@ -308,7 +306,7 @@
       <p:sp>
         <p:nvSpPr>
           <p:cNvPr id="4" name="圆角矩形 3">
-            <a:hlinkClick r:id="rId3" action="ppaction://hlinksldjump"/>
+            <a:hlinkClick r:id="" action="ppaction://noaction"/>
           </p:cNvPr>
           <p:cNvSpPr/>
           <p:nvPr userDrawn="1"/>
@@ -376,7 +374,7 @@
       <p:sp>
         <p:nvSpPr>
           <p:cNvPr id="6" name="TextBox 26">
-            <a:hlinkClick r:id="rId4" action="ppaction://hlinksldjump"/>
+            <a:hlinkClick r:id="rId3" action="ppaction://hlinksldjump"/>
           </p:cNvPr>
           <p:cNvSpPr txBox="1"/>
           <p:nvPr userDrawn="1"/>
@@ -897,7 +895,7 @@
       <p:sp>
         <p:nvSpPr>
           <p:cNvPr id="14" name="圆角矩形 13">
-            <a:hlinkClick r:id="rId2" action="ppaction://hlinksldjump"/>
+            <a:hlinkClick r:id="" action="ppaction://noaction"/>
           </p:cNvPr>
           <p:cNvSpPr/>
           <p:nvPr userDrawn="1"/>
@@ -965,7 +963,7 @@
       <p:sp>
         <p:nvSpPr>
           <p:cNvPr id="15" name="TextBox 26">
-            <a:hlinkClick r:id="rId3" action="ppaction://hlinksldjump"/>
+            <a:hlinkClick r:id="rId2" action="ppaction://hlinksldjump"/>
           </p:cNvPr>
           <p:cNvSpPr txBox="1"/>
           <p:nvPr userDrawn="1"/>
@@ -1351,7 +1349,7 @@
       <p:sp>
         <p:nvSpPr>
           <p:cNvPr id="7" name="圆角矩形 6">
-            <a:hlinkClick r:id="rId2" action="ppaction://hlinksldjump"/>
+            <a:hlinkClick r:id="" action="ppaction://noaction"/>
           </p:cNvPr>
           <p:cNvSpPr/>
           <p:nvPr userDrawn="1"/>
@@ -1420,7 +1418,7 @@
       <p:sp>
         <p:nvSpPr>
           <p:cNvPr id="8" name="TextBox 26">
-            <a:hlinkClick r:id="rId3" action="ppaction://hlinksldjump"/>
+            <a:hlinkClick r:id="rId2" action="ppaction://hlinksldjump"/>
           </p:cNvPr>
           <p:cNvSpPr txBox="1"/>
           <p:nvPr userDrawn="1"/>
@@ -1937,1100 +1935,6 @@
 
 <file path=ppt/slides/slide1.xml><?xml version="1.0" encoding="utf-8"?>
 <p:sld xmlns:a="http://schemas.openxmlformats.org/drawingml/2006/main" xmlns:r="http://schemas.openxmlformats.org/officeDocument/2006/relationships" xmlns:p="http://schemas.openxmlformats.org/presentationml/2006/main">
-  <p:cSld name="YTSlide_9_1_0.9_1.3_0.9_1.1__1_1_0_0">
-    <p:spTree>
-      <p:nvGrpSpPr>
-        <p:cNvPr id="1" name=""/>
-        <p:cNvGrpSpPr/>
-        <p:nvPr/>
-      </p:nvGrpSpPr>
-      <p:grpSpPr>
-        <a:xfrm>
-          <a:off x="0" y="0"/>
-          <a:ext cx="0" cy="0"/>
-          <a:chOff x="0" y="0"/>
-          <a:chExt cx="0" cy="0"/>
-        </a:xfrm>
-      </p:grpSpPr>
-      <p:pic>
-        <p:nvPicPr>
-          <p:cNvPr id="2" name="图片 1"/>
-          <p:cNvPicPr>
-            <a:picLocks noChangeAspect="1"/>
-          </p:cNvPicPr>
-          <p:nvPr/>
-        </p:nvPicPr>
-        <p:blipFill>
-          <a:blip r:embed="rId2"/>
-          <a:stretch>
-            <a:fillRect/>
-          </a:stretch>
-        </p:blipFill>
-        <p:spPr>
-          <a:xfrm>
-            <a:off x="2337" y="2144142"/>
-            <a:ext cx="12208713" cy="2904107"/>
-          </a:xfrm>
-          <a:prstGeom prst="rect">
-            <a:avLst/>
-          </a:prstGeom>
-        </p:spPr>
-      </p:pic>
-      <p:sp>
-        <p:nvSpPr>
-          <p:cNvPr id="7" name="矩形 6"/>
-          <p:cNvSpPr/>
-          <p:nvPr/>
-        </p:nvSpPr>
-        <p:spPr>
-          <a:xfrm>
-            <a:off x="19050" y="2152649"/>
-            <a:ext cx="12192000" cy="2895600"/>
-          </a:xfrm>
-          <a:prstGeom prst="rect">
-            <a:avLst/>
-          </a:prstGeom>
-          <a:solidFill>
-            <a:schemeClr val="tx1">
-              <a:lumMod val="50000"/>
-              <a:lumOff val="50000"/>
-              <a:alpha val="27000"/>
-            </a:schemeClr>
-          </a:solidFill>
-          <a:ln>
-            <a:noFill/>
-          </a:ln>
-        </p:spPr>
-        <p:style>
-          <a:lnRef idx="2">
-            <a:schemeClr val="accent1">
-              <a:shade val="50000"/>
-            </a:schemeClr>
-          </a:lnRef>
-          <a:fillRef idx="1">
-            <a:schemeClr val="accent1"/>
-          </a:fillRef>
-          <a:effectRef idx="0">
-            <a:schemeClr val="accent1"/>
-          </a:effectRef>
-          <a:fontRef idx="minor">
-            <a:schemeClr val="lt1"/>
-          </a:fontRef>
-        </p:style>
-        <p:txBody>
-          <a:bodyPr rtlCol="0" anchor="ctr"/>
-          <a:lstStyle/>
-          <a:p>
-            <a:pPr algn="ctr"/>
-            <a:endParaRPr lang="zh-CN" altLang="en-US"/>
-          </a:p>
-        </p:txBody>
-      </p:sp>
-      <p:sp>
-        <p:nvSpPr>
-          <p:cNvPr id="5" name="文本框 4"/>
-          <p:cNvSpPr txBox="1"/>
-          <p:nvPr/>
-        </p:nvSpPr>
-        <p:spPr>
-          <a:xfrm>
-            <a:off x="0" y="2458695"/>
-            <a:ext cx="12192000" cy="1785104"/>
-          </a:xfrm>
-          <a:prstGeom prst="rect">
-            <a:avLst/>
-          </a:prstGeom>
-          <a:noFill/>
-        </p:spPr>
-        <p:txBody>
-          <a:bodyPr wrap="square" rtlCol="0">
-            <a:spAutoFit/>
-          </a:bodyPr>
-          <a:lstStyle/>
-          <a:p>
-            <a:pPr algn="ctr" eaLnBrk="1" latinLnBrk="0" hangingPunct="0"/>
-            <a:r>
-              <a:rPr lang="zh-CN" altLang="en-US" sz="5500" b="1" dirty="0">
-                <a:solidFill>
-                  <a:schemeClr val="bg1"/>
-                </a:solidFill>
-                <a:latin typeface="微软雅黑" panose="020B0503020204020204" pitchFamily="34" charset="-122"/>
-                <a:ea typeface="微软雅黑" panose="020B0503020204020204" pitchFamily="34" charset="-122"/>
-              </a:rPr>
-              <a:t>实验</a:t>
-            </a:r>
-            <a:endParaRPr lang="en-US" altLang="zh-CN" sz="5500" b="1" dirty="0">
-              <a:solidFill>
-                <a:schemeClr val="bg1"/>
-              </a:solidFill>
-              <a:latin typeface="微软雅黑" panose="020B0503020204020204" pitchFamily="34" charset="-122"/>
-              <a:ea typeface="微软雅黑" panose="020B0503020204020204" pitchFamily="34" charset="-122"/>
-            </a:endParaRPr>
-          </a:p>
-          <a:p>
-            <a:pPr algn="ctr" eaLnBrk="1" latinLnBrk="0" hangingPunct="0"/>
-            <a:r>
-              <a:rPr lang="zh-CN" altLang="en-US" sz="5500" b="1" dirty="0">
-                <a:solidFill>
-                  <a:schemeClr val="bg1"/>
-                </a:solidFill>
-                <a:latin typeface="微软雅黑" panose="020B0503020204020204" pitchFamily="34" charset="-122"/>
-                <a:ea typeface="微软雅黑" panose="020B0503020204020204" pitchFamily="34" charset="-122"/>
-              </a:rPr>
-              <a:t>验证动量守恒定律</a:t>
-            </a:r>
-          </a:p>
-        </p:txBody>
-      </p:sp>
-    </p:spTree>
-    <p:extLst>
-      <p:ext uri="{BB962C8B-B14F-4D97-AF65-F5344CB8AC3E}">
-        <p14:creationId xmlns:p14="http://schemas.microsoft.com/office/powerpoint/2010/main" val="352947056"/>
-      </p:ext>
-    </p:extLst>
-  </p:cSld>
-  <p:clrMapOvr>
-    <a:masterClrMapping/>
-  </p:clrMapOvr>
-  <mc:AlternateContent xmlns:mc="http://schemas.openxmlformats.org/markup-compatibility/2006" xmlns:p14="http://schemas.microsoft.com/office/powerpoint/2010/main">
-    <mc:Choice Requires="p14">
-      <p:transition spd="slow" p14:dur="4000">
-        <p14:vortex dir="r"/>
-      </p:transition>
-    </mc:Choice>
-    <mc:Fallback xmlns="">
-      <p:transition spd="slow">
-        <p:fade/>
-      </p:transition>
-    </mc:Fallback>
-  </mc:AlternateContent>
-  <p:timing>
-    <p:tnLst>
-      <p:par>
-        <p:cTn id="1" dur="indefinite" restart="never" nodeType="tmRoot">
-          <p:childTnLst>
-            <p:seq concurrent="1" nextAc="seek">
-              <p:cTn id="2" dur="indefinite" nodeType="mainSeq">
-                <p:childTnLst>
-                  <p:par>
-                    <p:cTn id="3" fill="hold">
-                      <p:stCondLst>
-                        <p:cond delay="indefinite"/>
-                        <p:cond evt="onBegin" delay="0">
-                          <p:tn val="2"/>
-                        </p:cond>
-                      </p:stCondLst>
-                      <p:childTnLst>
-                        <p:par>
-                          <p:cTn id="4" fill="hold">
-                            <p:stCondLst>
-                              <p:cond delay="0"/>
-                            </p:stCondLst>
-                            <p:childTnLst>
-                              <p:par>
-                                <p:cTn id="5" presetID="53" presetClass="entr" presetSubtype="16" fill="hold" grpId="0" nodeType="withEffect">
-                                  <p:stCondLst>
-                                    <p:cond delay="0"/>
-                                  </p:stCondLst>
-                                  <p:childTnLst>
-                                    <p:set>
-                                      <p:cBhvr>
-                                        <p:cTn id="6" dur="1" fill="hold">
-                                          <p:stCondLst>
-                                            <p:cond delay="0"/>
-                                          </p:stCondLst>
-                                        </p:cTn>
-                                        <p:tgtEl>
-                                          <p:spTgt spid="5"/>
-                                        </p:tgtEl>
-                                        <p:attrNameLst>
-                                          <p:attrName>style.visibility</p:attrName>
-                                        </p:attrNameLst>
-                                      </p:cBhvr>
-                                      <p:to>
-                                        <p:strVal val="visible"/>
-                                      </p:to>
-                                    </p:set>
-                                    <p:anim calcmode="lin" valueType="num">
-                                      <p:cBhvr>
-                                        <p:cTn id="7" dur="500" fill="hold"/>
-                                        <p:tgtEl>
-                                          <p:spTgt spid="5"/>
-                                        </p:tgtEl>
-                                        <p:attrNameLst>
-                                          <p:attrName>ppt_w</p:attrName>
-                                        </p:attrNameLst>
-                                      </p:cBhvr>
-                                      <p:tavLst>
-                                        <p:tav tm="0">
-                                          <p:val>
-                                            <p:fltVal val="0"/>
-                                          </p:val>
-                                        </p:tav>
-                                        <p:tav tm="100000">
-                                          <p:val>
-                                            <p:strVal val="#ppt_w"/>
-                                          </p:val>
-                                        </p:tav>
-                                      </p:tavLst>
-                                    </p:anim>
-                                    <p:anim calcmode="lin" valueType="num">
-                                      <p:cBhvr>
-                                        <p:cTn id="8" dur="500" fill="hold"/>
-                                        <p:tgtEl>
-                                          <p:spTgt spid="5"/>
-                                        </p:tgtEl>
-                                        <p:attrNameLst>
-                                          <p:attrName>ppt_h</p:attrName>
-                                        </p:attrNameLst>
-                                      </p:cBhvr>
-                                      <p:tavLst>
-                                        <p:tav tm="0">
-                                          <p:val>
-                                            <p:fltVal val="0"/>
-                                          </p:val>
-                                        </p:tav>
-                                        <p:tav tm="100000">
-                                          <p:val>
-                                            <p:strVal val="#ppt_h"/>
-                                          </p:val>
-                                        </p:tav>
-                                      </p:tavLst>
-                                    </p:anim>
-                                    <p:animEffect transition="in" filter="fade">
-                                      <p:cBhvr>
-                                        <p:cTn id="9" dur="500"/>
-                                        <p:tgtEl>
-                                          <p:spTgt spid="5"/>
-                                        </p:tgtEl>
-                                      </p:cBhvr>
-                                    </p:animEffect>
-                                  </p:childTnLst>
-                                </p:cTn>
-                              </p:par>
-                            </p:childTnLst>
-                          </p:cTn>
-                        </p:par>
-                      </p:childTnLst>
-                    </p:cTn>
-                  </p:par>
-                </p:childTnLst>
-              </p:cTn>
-              <p:prevCondLst>
-                <p:cond evt="onPrev" delay="0">
-                  <p:tgtEl>
-                    <p:sldTgt/>
-                  </p:tgtEl>
-                </p:cond>
-              </p:prevCondLst>
-              <p:nextCondLst>
-                <p:cond evt="onNext" delay="0">
-                  <p:tgtEl>
-                    <p:sldTgt/>
-                  </p:tgtEl>
-                </p:cond>
-              </p:nextCondLst>
-            </p:seq>
-          </p:childTnLst>
-        </p:cTn>
-      </p:par>
-    </p:tnLst>
-    <p:bldLst>
-      <p:bldP spid="5" grpId="0"/>
-    </p:bldLst>
-  </p:timing>
-</p:sld>
-</file>
-
-<file path=ppt/slides/slide2.xml><?xml version="1.0" encoding="utf-8"?>
-<p:sld xmlns:a="http://schemas.openxmlformats.org/drawingml/2006/main" xmlns:r="http://schemas.openxmlformats.org/officeDocument/2006/relationships" xmlns:p="http://schemas.openxmlformats.org/presentationml/2006/main">
-  <p:cSld>
-    <p:spTree>
-      <p:nvGrpSpPr>
-        <p:cNvPr id="1" name=""/>
-        <p:cNvGrpSpPr/>
-        <p:nvPr/>
-      </p:nvGrpSpPr>
-      <p:grpSpPr>
-        <a:xfrm>
-          <a:off x="0" y="0"/>
-          <a:ext cx="0" cy="0"/>
-          <a:chOff x="0" y="0"/>
-          <a:chExt cx="0" cy="0"/>
-        </a:xfrm>
-      </p:grpSpPr>
-      <p:sp>
-        <p:nvSpPr>
-          <p:cNvPr id="5" name="矩形 4"/>
-          <p:cNvSpPr/>
-          <p:nvPr/>
-        </p:nvSpPr>
-        <p:spPr>
-          <a:xfrm>
-            <a:off x="0" y="1428750"/>
-            <a:ext cx="12192000" cy="3670300"/>
-          </a:xfrm>
-          <a:prstGeom prst="rect">
-            <a:avLst/>
-          </a:prstGeom>
-          <a:solidFill>
-            <a:schemeClr val="bg1">
-              <a:alpha val="82000"/>
-            </a:schemeClr>
-          </a:solidFill>
-          <a:ln>
-            <a:noFill/>
-          </a:ln>
-        </p:spPr>
-        <p:style>
-          <a:lnRef idx="2">
-            <a:schemeClr val="accent1">
-              <a:shade val="50000"/>
-            </a:schemeClr>
-          </a:lnRef>
-          <a:fillRef idx="1">
-            <a:schemeClr val="accent1"/>
-          </a:fillRef>
-          <a:effectRef idx="0">
-            <a:schemeClr val="accent1"/>
-          </a:effectRef>
-          <a:fontRef idx="minor">
-            <a:schemeClr val="lt1"/>
-          </a:fontRef>
-        </p:style>
-        <p:txBody>
-          <a:bodyPr rtlCol="0" anchor="ctr"/>
-          <a:lstStyle/>
-          <a:p>
-            <a:pPr algn="ctr"/>
-            <a:endParaRPr lang="zh-CN" altLang="en-US"/>
-          </a:p>
-        </p:txBody>
-      </p:sp>
-      <p:cxnSp>
-        <p:nvCxnSpPr>
-          <p:cNvPr id="10" name="直接连接符 9"/>
-          <p:cNvCxnSpPr/>
-          <p:nvPr/>
-        </p:nvCxnSpPr>
-        <p:spPr>
-          <a:xfrm>
-            <a:off x="3953061" y="2060475"/>
-            <a:ext cx="0" cy="595635"/>
-          </a:xfrm>
-          <a:prstGeom prst="line">
-            <a:avLst/>
-          </a:prstGeom>
-          <a:ln w="22225">
-            <a:solidFill>
-              <a:srgbClr val="22252A"/>
-            </a:solidFill>
-          </a:ln>
-          <a:effectLst>
-            <a:outerShdw blurRad="101600" dist="38100" dir="2700000" algn="tl" rotWithShape="0">
-              <a:prstClr val="black">
-                <a:alpha val="25000"/>
-              </a:prstClr>
-            </a:outerShdw>
-          </a:effectLst>
-        </p:spPr>
-        <p:style>
-          <a:lnRef idx="1">
-            <a:schemeClr val="accent1"/>
-          </a:lnRef>
-          <a:fillRef idx="0">
-            <a:schemeClr val="accent1"/>
-          </a:fillRef>
-          <a:effectRef idx="0">
-            <a:schemeClr val="accent1"/>
-          </a:effectRef>
-          <a:fontRef idx="minor">
-            <a:schemeClr val="tx1"/>
-          </a:fontRef>
-        </p:style>
-      </p:cxnSp>
-      <p:cxnSp>
-        <p:nvCxnSpPr>
-          <p:cNvPr id="11" name="直接连接符 10"/>
-          <p:cNvCxnSpPr/>
-          <p:nvPr/>
-        </p:nvCxnSpPr>
-        <p:spPr>
-          <a:xfrm>
-            <a:off x="1644576" y="3302066"/>
-            <a:ext cx="0" cy="595635"/>
-          </a:xfrm>
-          <a:prstGeom prst="line">
-            <a:avLst/>
-          </a:prstGeom>
-          <a:ln w="22225">
-            <a:solidFill>
-              <a:srgbClr val="C00000"/>
-            </a:solidFill>
-          </a:ln>
-          <a:effectLst>
-            <a:outerShdw blurRad="101600" dist="38100" dir="2700000" algn="tl" rotWithShape="0">
-              <a:prstClr val="black">
-                <a:alpha val="25000"/>
-              </a:prstClr>
-            </a:outerShdw>
-          </a:effectLst>
-        </p:spPr>
-        <p:style>
-          <a:lnRef idx="1">
-            <a:schemeClr val="accent1"/>
-          </a:lnRef>
-          <a:fillRef idx="0">
-            <a:schemeClr val="accent1"/>
-          </a:fillRef>
-          <a:effectRef idx="0">
-            <a:schemeClr val="accent1"/>
-          </a:effectRef>
-          <a:fontRef idx="minor">
-            <a:schemeClr val="tx1"/>
-          </a:fontRef>
-        </p:style>
-      </p:cxnSp>
-      <p:grpSp>
-        <p:nvGrpSpPr>
-          <p:cNvPr id="12" name="组合 11"/>
-          <p:cNvGrpSpPr/>
-          <p:nvPr/>
-        </p:nvGrpSpPr>
-        <p:grpSpPr>
-          <a:xfrm>
-            <a:off x="1948306" y="2068901"/>
-            <a:ext cx="1798820" cy="1798820"/>
-            <a:chOff x="2329306" y="2634955"/>
-            <a:chExt cx="1798820" cy="1798820"/>
-          </a:xfrm>
-        </p:grpSpPr>
-        <p:sp>
-          <p:nvSpPr>
-            <p:cNvPr id="13" name="矩形 12"/>
-            <p:cNvSpPr/>
-            <p:nvPr/>
-          </p:nvSpPr>
-          <p:spPr>
-            <a:xfrm>
-              <a:off x="2329306" y="2634955"/>
-              <a:ext cx="1798820" cy="1798820"/>
-            </a:xfrm>
-            <a:prstGeom prst="rect">
-              <a:avLst/>
-            </a:prstGeom>
-            <a:solidFill>
-              <a:schemeClr val="accent2">
-                <a:lumMod val="75000"/>
-              </a:schemeClr>
-            </a:solidFill>
-            <a:ln>
-              <a:noFill/>
-            </a:ln>
-            <a:effectLst>
-              <a:outerShdw blurRad="101600" dist="38100" dir="2700000" algn="tl" rotWithShape="0">
-                <a:prstClr val="black">
-                  <a:alpha val="25000"/>
-                </a:prstClr>
-              </a:outerShdw>
-            </a:effectLst>
-          </p:spPr>
-          <p:style>
-            <a:lnRef idx="2">
-              <a:schemeClr val="accent1">
-                <a:shade val="50000"/>
-              </a:schemeClr>
-            </a:lnRef>
-            <a:fillRef idx="1">
-              <a:schemeClr val="accent1"/>
-            </a:fillRef>
-            <a:effectRef idx="0">
-              <a:schemeClr val="accent1"/>
-            </a:effectRef>
-            <a:fontRef idx="minor">
-              <a:schemeClr val="lt1"/>
-            </a:fontRef>
-          </p:style>
-          <p:txBody>
-            <a:bodyPr rtlCol="0" anchor="ctr"/>
-            <a:lstStyle/>
-            <a:p>
-              <a:pPr algn="ctr"/>
-              <a:endParaRPr lang="zh-CN" altLang="en-US"/>
-            </a:p>
-          </p:txBody>
-        </p:sp>
-        <p:sp>
-          <p:nvSpPr>
-            <p:cNvPr id="14" name="文本框 13"/>
-            <p:cNvSpPr txBox="1"/>
-            <p:nvPr/>
-          </p:nvSpPr>
-          <p:spPr>
-            <a:xfrm>
-              <a:off x="2797975" y="2969317"/>
-              <a:ext cx="864339" cy="1107996"/>
-            </a:xfrm>
-            <a:prstGeom prst="rect">
-              <a:avLst/>
-            </a:prstGeom>
-            <a:noFill/>
-          </p:spPr>
-          <p:txBody>
-            <a:bodyPr wrap="none" rtlCol="0">
-              <a:spAutoFit/>
-            </a:bodyPr>
-            <a:lstStyle/>
-            <a:p>
-              <a:pPr algn="ctr"/>
-              <a:r>
-                <a:rPr lang="en-US" altLang="zh-CN" sz="6600" dirty="0">
-                  <a:solidFill>
-                    <a:schemeClr val="bg1"/>
-                  </a:solidFill>
-                  <a:latin typeface="Aparajita" panose="020B0604020202020204" pitchFamily="34" charset="0"/>
-                  <a:cs typeface="Aparajita" panose="020B0604020202020204" pitchFamily="34" charset="0"/>
-                </a:rPr>
-                <a:t>01</a:t>
-              </a:r>
-              <a:endParaRPr lang="zh-CN" altLang="en-US" sz="6600" dirty="0">
-                <a:solidFill>
-                  <a:schemeClr val="bg1"/>
-                </a:solidFill>
-                <a:latin typeface="Aparajita" panose="020B0604020202020204" pitchFamily="34" charset="0"/>
-                <a:cs typeface="Aparajita" panose="020B0604020202020204" pitchFamily="34" charset="0"/>
-              </a:endParaRPr>
-            </a:p>
-          </p:txBody>
-        </p:sp>
-        <p:sp>
-          <p:nvSpPr>
-            <p:cNvPr id="15" name="文本框 14"/>
-            <p:cNvSpPr txBox="1"/>
-            <p:nvPr/>
-          </p:nvSpPr>
-          <p:spPr>
-            <a:xfrm>
-              <a:off x="2814911" y="3723965"/>
-              <a:ext cx="817853" cy="461665"/>
-            </a:xfrm>
-            <a:prstGeom prst="rect">
-              <a:avLst/>
-            </a:prstGeom>
-            <a:noFill/>
-          </p:spPr>
-          <p:txBody>
-            <a:bodyPr wrap="none" rtlCol="0">
-              <a:spAutoFit/>
-            </a:bodyPr>
-            <a:lstStyle/>
-            <a:p>
-              <a:pPr algn="ctr"/>
-              <a:r>
-                <a:rPr lang="en-US" altLang="zh-CN" sz="2400" dirty="0">
-                  <a:solidFill>
-                    <a:schemeClr val="bg1"/>
-                  </a:solidFill>
-                  <a:latin typeface="Aparajita" panose="020B0604020202020204" pitchFamily="34" charset="0"/>
-                  <a:cs typeface="Aparajita" panose="020B0604020202020204" pitchFamily="34" charset="0"/>
-                </a:rPr>
-                <a:t>PART</a:t>
-              </a:r>
-              <a:endParaRPr lang="zh-CN" altLang="en-US" sz="2400" dirty="0">
-                <a:solidFill>
-                  <a:schemeClr val="bg1"/>
-                </a:solidFill>
-                <a:latin typeface="Aparajita" panose="020B0604020202020204" pitchFamily="34" charset="0"/>
-                <a:cs typeface="Aparajita" panose="020B0604020202020204" pitchFamily="34" charset="0"/>
-              </a:endParaRPr>
-            </a:p>
-          </p:txBody>
-        </p:sp>
-      </p:grpSp>
-      <p:sp>
-        <p:nvSpPr>
-          <p:cNvPr id="16" name="文本框 15">
-            <a:hlinkClick r:id="rId2" action="ppaction://hlinksldjump"/>
-          </p:cNvPr>
-          <p:cNvSpPr txBox="1"/>
-          <p:nvPr/>
-        </p:nvSpPr>
-        <p:spPr>
-          <a:xfrm>
-            <a:off x="4063555" y="2607018"/>
-            <a:ext cx="8347080" cy="754053"/>
-          </a:xfrm>
-          <a:prstGeom prst="rect">
-            <a:avLst/>
-          </a:prstGeom>
-          <a:noFill/>
-        </p:spPr>
-        <p:txBody>
-          <a:bodyPr wrap="square" rtlCol="0">
-            <a:spAutoFit/>
-          </a:bodyPr>
-          <a:lstStyle/>
-          <a:p>
-            <a:r>
-              <a:rPr lang="zh-CN" altLang="en-US" sz="4300" b="1" dirty="0">
-                <a:solidFill>
-                  <a:schemeClr val="tx1">
-                    <a:lumMod val="85000"/>
-                    <a:lumOff val="15000"/>
-                  </a:schemeClr>
-                </a:solidFill>
-                <a:latin typeface="微软雅黑" panose="020B0503020204020204" pitchFamily="34" charset="-122"/>
-                <a:ea typeface="微软雅黑" panose="020B0503020204020204" pitchFamily="34" charset="-122"/>
-              </a:rPr>
-              <a:t>实验视频　验证动量守恒定律</a:t>
-            </a:r>
-          </a:p>
-        </p:txBody>
-      </p:sp>
-    </p:spTree>
-    <p:extLst>
-      <p:ext uri="{BB962C8B-B14F-4D97-AF65-F5344CB8AC3E}">
-        <p14:creationId xmlns:p14="http://schemas.microsoft.com/office/powerpoint/2010/main" val="3558856038"/>
-      </p:ext>
-    </p:extLst>
-  </p:cSld>
-  <p:clrMapOvr>
-    <a:masterClrMapping/>
-  </p:clrMapOvr>
-  <p:transition spd="slow">
-    <p:comb/>
-  </p:transition>
-  <p:timing>
-    <p:tnLst>
-      <p:par>
-        <p:cTn id="1" dur="indefinite" restart="never" nodeType="tmRoot">
-          <p:childTnLst>
-            <p:seq concurrent="1" nextAc="seek">
-              <p:cTn id="2" dur="indefinite" nodeType="mainSeq">
-                <p:childTnLst>
-                  <p:par>
-                    <p:cTn id="3" fill="hold">
-                      <p:stCondLst>
-                        <p:cond delay="indefinite"/>
-                        <p:cond evt="onBegin" delay="0">
-                          <p:tn val="2"/>
-                        </p:cond>
-                      </p:stCondLst>
-                      <p:childTnLst>
-                        <p:par>
-                          <p:cTn id="4" fill="hold">
-                            <p:stCondLst>
-                              <p:cond delay="0"/>
-                            </p:stCondLst>
-                            <p:childTnLst>
-                              <p:par>
-                                <p:cTn id="5" presetID="53" presetClass="entr" presetSubtype="16" fill="hold" nodeType="withEffect">
-                                  <p:stCondLst>
-                                    <p:cond delay="750"/>
-                                  </p:stCondLst>
-                                  <p:childTnLst>
-                                    <p:set>
-                                      <p:cBhvr>
-                                        <p:cTn id="6" dur="1" fill="hold">
-                                          <p:stCondLst>
-                                            <p:cond delay="0"/>
-                                          </p:stCondLst>
-                                        </p:cTn>
-                                        <p:tgtEl>
-                                          <p:spTgt spid="12"/>
-                                        </p:tgtEl>
-                                        <p:attrNameLst>
-                                          <p:attrName>style.visibility</p:attrName>
-                                        </p:attrNameLst>
-                                      </p:cBhvr>
-                                      <p:to>
-                                        <p:strVal val="visible"/>
-                                      </p:to>
-                                    </p:set>
-                                    <p:anim calcmode="lin" valueType="num">
-                                      <p:cBhvr>
-                                        <p:cTn id="7" dur="500" fill="hold"/>
-                                        <p:tgtEl>
-                                          <p:spTgt spid="12"/>
-                                        </p:tgtEl>
-                                        <p:attrNameLst>
-                                          <p:attrName>ppt_w</p:attrName>
-                                        </p:attrNameLst>
-                                      </p:cBhvr>
-                                      <p:tavLst>
-                                        <p:tav tm="0">
-                                          <p:val>
-                                            <p:fltVal val="0"/>
-                                          </p:val>
-                                        </p:tav>
-                                        <p:tav tm="100000">
-                                          <p:val>
-                                            <p:strVal val="#ppt_w"/>
-                                          </p:val>
-                                        </p:tav>
-                                      </p:tavLst>
-                                    </p:anim>
-                                    <p:anim calcmode="lin" valueType="num">
-                                      <p:cBhvr>
-                                        <p:cTn id="8" dur="500" fill="hold"/>
-                                        <p:tgtEl>
-                                          <p:spTgt spid="12"/>
-                                        </p:tgtEl>
-                                        <p:attrNameLst>
-                                          <p:attrName>ppt_h</p:attrName>
-                                        </p:attrNameLst>
-                                      </p:cBhvr>
-                                      <p:tavLst>
-                                        <p:tav tm="0">
-                                          <p:val>
-                                            <p:fltVal val="0"/>
-                                          </p:val>
-                                        </p:tav>
-                                        <p:tav tm="100000">
-                                          <p:val>
-                                            <p:strVal val="#ppt_h"/>
-                                          </p:val>
-                                        </p:tav>
-                                      </p:tavLst>
-                                    </p:anim>
-                                    <p:animEffect transition="in" filter="fade">
-                                      <p:cBhvr>
-                                        <p:cTn id="9" dur="500"/>
-                                        <p:tgtEl>
-                                          <p:spTgt spid="12"/>
-                                        </p:tgtEl>
-                                      </p:cBhvr>
-                                    </p:animEffect>
-                                  </p:childTnLst>
-                                </p:cTn>
-                              </p:par>
-                              <p:par>
-                                <p:cTn id="10" presetID="2" presetClass="entr" presetSubtype="4" fill="hold" nodeType="withEffect">
-                                  <p:stCondLst>
-                                    <p:cond delay="750"/>
-                                  </p:stCondLst>
-                                  <p:childTnLst>
-                                    <p:set>
-                                      <p:cBhvr>
-                                        <p:cTn id="11" dur="1" fill="hold">
-                                          <p:stCondLst>
-                                            <p:cond delay="0"/>
-                                          </p:stCondLst>
-                                        </p:cTn>
-                                        <p:tgtEl>
-                                          <p:spTgt spid="10"/>
-                                        </p:tgtEl>
-                                        <p:attrNameLst>
-                                          <p:attrName>style.visibility</p:attrName>
-                                        </p:attrNameLst>
-                                      </p:cBhvr>
-                                      <p:to>
-                                        <p:strVal val="visible"/>
-                                      </p:to>
-                                    </p:set>
-                                    <p:anim calcmode="lin" valueType="num">
-                                      <p:cBhvr additive="base">
-                                        <p:cTn id="12" dur="500" fill="hold"/>
-                                        <p:tgtEl>
-                                          <p:spTgt spid="10"/>
-                                        </p:tgtEl>
-                                        <p:attrNameLst>
-                                          <p:attrName>ppt_x</p:attrName>
-                                        </p:attrNameLst>
-                                      </p:cBhvr>
-                                      <p:tavLst>
-                                        <p:tav tm="0">
-                                          <p:val>
-                                            <p:strVal val="#ppt_x"/>
-                                          </p:val>
-                                        </p:tav>
-                                        <p:tav tm="100000">
-                                          <p:val>
-                                            <p:strVal val="#ppt_x"/>
-                                          </p:val>
-                                        </p:tav>
-                                      </p:tavLst>
-                                    </p:anim>
-                                    <p:anim calcmode="lin" valueType="num">
-                                      <p:cBhvr additive="base">
-                                        <p:cTn id="13" dur="500" fill="hold"/>
-                                        <p:tgtEl>
-                                          <p:spTgt spid="10"/>
-                                        </p:tgtEl>
-                                        <p:attrNameLst>
-                                          <p:attrName>ppt_y</p:attrName>
-                                        </p:attrNameLst>
-                                      </p:cBhvr>
-                                      <p:tavLst>
-                                        <p:tav tm="0">
-                                          <p:val>
-                                            <p:strVal val="1+#ppt_h/2"/>
-                                          </p:val>
-                                        </p:tav>
-                                        <p:tav tm="100000">
-                                          <p:val>
-                                            <p:strVal val="#ppt_y"/>
-                                          </p:val>
-                                        </p:tav>
-                                      </p:tavLst>
-                                    </p:anim>
-                                  </p:childTnLst>
-                                </p:cTn>
-                              </p:par>
-                              <p:par>
-                                <p:cTn id="14" presetID="2" presetClass="entr" presetSubtype="1" fill="hold" nodeType="withEffect">
-                                  <p:stCondLst>
-                                    <p:cond delay="750"/>
-                                  </p:stCondLst>
-                                  <p:childTnLst>
-                                    <p:set>
-                                      <p:cBhvr>
-                                        <p:cTn id="15" dur="1" fill="hold">
-                                          <p:stCondLst>
-                                            <p:cond delay="0"/>
-                                          </p:stCondLst>
-                                        </p:cTn>
-                                        <p:tgtEl>
-                                          <p:spTgt spid="11"/>
-                                        </p:tgtEl>
-                                        <p:attrNameLst>
-                                          <p:attrName>style.visibility</p:attrName>
-                                        </p:attrNameLst>
-                                      </p:cBhvr>
-                                      <p:to>
-                                        <p:strVal val="visible"/>
-                                      </p:to>
-                                    </p:set>
-                                    <p:anim calcmode="lin" valueType="num">
-                                      <p:cBhvr additive="base">
-                                        <p:cTn id="16" dur="500" fill="hold"/>
-                                        <p:tgtEl>
-                                          <p:spTgt spid="11"/>
-                                        </p:tgtEl>
-                                        <p:attrNameLst>
-                                          <p:attrName>ppt_x</p:attrName>
-                                        </p:attrNameLst>
-                                      </p:cBhvr>
-                                      <p:tavLst>
-                                        <p:tav tm="0">
-                                          <p:val>
-                                            <p:strVal val="#ppt_x"/>
-                                          </p:val>
-                                        </p:tav>
-                                        <p:tav tm="100000">
-                                          <p:val>
-                                            <p:strVal val="#ppt_x"/>
-                                          </p:val>
-                                        </p:tav>
-                                      </p:tavLst>
-                                    </p:anim>
-                                    <p:anim calcmode="lin" valueType="num">
-                                      <p:cBhvr additive="base">
-                                        <p:cTn id="17" dur="500" fill="hold"/>
-                                        <p:tgtEl>
-                                          <p:spTgt spid="11"/>
-                                        </p:tgtEl>
-                                        <p:attrNameLst>
-                                          <p:attrName>ppt_y</p:attrName>
-                                        </p:attrNameLst>
-                                      </p:cBhvr>
-                                      <p:tavLst>
-                                        <p:tav tm="0">
-                                          <p:val>
-                                            <p:strVal val="0-#ppt_h/2"/>
-                                          </p:val>
-                                        </p:tav>
-                                        <p:tav tm="100000">
-                                          <p:val>
-                                            <p:strVal val="#ppt_y"/>
-                                          </p:val>
-                                        </p:tav>
-                                      </p:tavLst>
-                                    </p:anim>
-                                  </p:childTnLst>
-                                </p:cTn>
-                              </p:par>
-                              <p:par>
-                                <p:cTn id="18" presetID="41" presetClass="entr" presetSubtype="0" fill="hold" grpId="0" nodeType="withEffect">
-                                  <p:stCondLst>
-                                    <p:cond delay="1000"/>
-                                  </p:stCondLst>
-                                  <p:iterate type="lt">
-                                    <p:tmPct val="10000"/>
-                                  </p:iterate>
-                                  <p:childTnLst>
-                                    <p:set>
-                                      <p:cBhvr>
-                                        <p:cTn id="19" dur="1" fill="hold">
-                                          <p:stCondLst>
-                                            <p:cond delay="0"/>
-                                          </p:stCondLst>
-                                        </p:cTn>
-                                        <p:tgtEl>
-                                          <p:spTgt spid="16"/>
-                                        </p:tgtEl>
-                                        <p:attrNameLst>
-                                          <p:attrName>style.visibility</p:attrName>
-                                        </p:attrNameLst>
-                                      </p:cBhvr>
-                                      <p:to>
-                                        <p:strVal val="visible"/>
-                                      </p:to>
-                                    </p:set>
-                                    <p:anim calcmode="lin" valueType="num">
-                                      <p:cBhvr>
-                                        <p:cTn id="20" dur="500" fill="hold"/>
-                                        <p:tgtEl>
-                                          <p:spTgt spid="16"/>
-                                        </p:tgtEl>
-                                        <p:attrNameLst>
-                                          <p:attrName>ppt_x</p:attrName>
-                                        </p:attrNameLst>
-                                      </p:cBhvr>
-                                      <p:tavLst>
-                                        <p:tav tm="0">
-                                          <p:val>
-                                            <p:strVal val="#ppt_x"/>
-                                          </p:val>
-                                        </p:tav>
-                                        <p:tav tm="50000">
-                                          <p:val>
-                                            <p:strVal val="#ppt_x+.1"/>
-                                          </p:val>
-                                        </p:tav>
-                                        <p:tav tm="100000">
-                                          <p:val>
-                                            <p:strVal val="#ppt_x"/>
-                                          </p:val>
-                                        </p:tav>
-                                      </p:tavLst>
-                                    </p:anim>
-                                    <p:anim calcmode="lin" valueType="num">
-                                      <p:cBhvr>
-                                        <p:cTn id="21" dur="500" fill="hold"/>
-                                        <p:tgtEl>
-                                          <p:spTgt spid="16"/>
-                                        </p:tgtEl>
-                                        <p:attrNameLst>
-                                          <p:attrName>ppt_y</p:attrName>
-                                        </p:attrNameLst>
-                                      </p:cBhvr>
-                                      <p:tavLst>
-                                        <p:tav tm="0">
-                                          <p:val>
-                                            <p:strVal val="#ppt_y"/>
-                                          </p:val>
-                                        </p:tav>
-                                        <p:tav tm="100000">
-                                          <p:val>
-                                            <p:strVal val="#ppt_y"/>
-                                          </p:val>
-                                        </p:tav>
-                                      </p:tavLst>
-                                    </p:anim>
-                                    <p:anim calcmode="lin" valueType="num">
-                                      <p:cBhvr>
-                                        <p:cTn id="22" dur="500" fill="hold"/>
-                                        <p:tgtEl>
-                                          <p:spTgt spid="16"/>
-                                        </p:tgtEl>
-                                        <p:attrNameLst>
-                                          <p:attrName>ppt_h</p:attrName>
-                                        </p:attrNameLst>
-                                      </p:cBhvr>
-                                      <p:tavLst>
-                                        <p:tav tm="0">
-                                          <p:val>
-                                            <p:strVal val="#ppt_h/10"/>
-                                          </p:val>
-                                        </p:tav>
-                                        <p:tav tm="50000">
-                                          <p:val>
-                                            <p:strVal val="#ppt_h+.01"/>
-                                          </p:val>
-                                        </p:tav>
-                                        <p:tav tm="100000">
-                                          <p:val>
-                                            <p:strVal val="#ppt_h"/>
-                                          </p:val>
-                                        </p:tav>
-                                      </p:tavLst>
-                                    </p:anim>
-                                    <p:anim calcmode="lin" valueType="num">
-                                      <p:cBhvr>
-                                        <p:cTn id="23" dur="500" fill="hold"/>
-                                        <p:tgtEl>
-                                          <p:spTgt spid="16"/>
-                                        </p:tgtEl>
-                                        <p:attrNameLst>
-                                          <p:attrName>ppt_w</p:attrName>
-                                        </p:attrNameLst>
-                                      </p:cBhvr>
-                                      <p:tavLst>
-                                        <p:tav tm="0">
-                                          <p:val>
-                                            <p:strVal val="#ppt_w/10"/>
-                                          </p:val>
-                                        </p:tav>
-                                        <p:tav tm="50000">
-                                          <p:val>
-                                            <p:strVal val="#ppt_w+.01"/>
-                                          </p:val>
-                                        </p:tav>
-                                        <p:tav tm="100000">
-                                          <p:val>
-                                            <p:strVal val="#ppt_w"/>
-                                          </p:val>
-                                        </p:tav>
-                                      </p:tavLst>
-                                    </p:anim>
-                                    <p:animEffect transition="in" filter="fade">
-                                      <p:cBhvr>
-                                        <p:cTn id="24" dur="500" tmFilter="0,0; .5, 1; 1, 1"/>
-                                        <p:tgtEl>
-                                          <p:spTgt spid="16"/>
-                                        </p:tgtEl>
-                                      </p:cBhvr>
-                                    </p:animEffect>
-                                  </p:childTnLst>
-                                </p:cTn>
-                              </p:par>
-                            </p:childTnLst>
-                          </p:cTn>
-                        </p:par>
-                      </p:childTnLst>
-                    </p:cTn>
-                  </p:par>
-                </p:childTnLst>
-              </p:cTn>
-              <p:prevCondLst>
-                <p:cond evt="onPrev" delay="0">
-                  <p:tgtEl>
-                    <p:sldTgt/>
-                  </p:tgtEl>
-                </p:cond>
-              </p:prevCondLst>
-              <p:nextCondLst>
-                <p:cond evt="onNext" delay="0">
-                  <p:tgtEl>
-                    <p:sldTgt/>
-                  </p:tgtEl>
-                </p:cond>
-              </p:nextCondLst>
-            </p:seq>
-          </p:childTnLst>
-        </p:cTn>
-      </p:par>
-    </p:tnLst>
-    <p:bldLst>
-      <p:bldP spid="16" grpId="0"/>
-    </p:bldLst>
-  </p:timing>
-</p:sld>
-</file>
-
-<file path=ppt/slides/slide3.xml><?xml version="1.0" encoding="utf-8"?>
-<p:sld xmlns:a="http://schemas.openxmlformats.org/drawingml/2006/main" xmlns:r="http://schemas.openxmlformats.org/officeDocument/2006/relationships" xmlns:p="http://schemas.openxmlformats.org/presentationml/2006/main">
   <p:cSld>
     <p:spTree>
       <p:nvGrpSpPr>
@@ -3049,7 +1953,7 @@
       <p:sp>
         <p:nvSpPr>
           <p:cNvPr id="2" name="视频卡片">
-            <a:hlinkClick r:id="rId3"/>
+            <a:hlinkClick r:id="rId2"/>
           </p:cNvPr>
           <p:cNvSpPr/>
           <p:nvPr/>
@@ -3091,13 +1995,14 @@
           <a:lstStyle/>
           <a:p>
             <a:pPr algn="ctr"/>
+            <a:endParaRPr/>
           </a:p>
         </p:txBody>
       </p:sp>
       <p:sp>
         <p:nvSpPr>
           <p:cNvPr id="3" name="播放按钮">
-            <a:hlinkClick r:id="rId3"/>
+            <a:hlinkClick r:id="rId2"/>
           </p:cNvPr>
           <p:cNvSpPr/>
           <p:nvPr/>
@@ -3137,13 +2042,14 @@
           <a:lstStyle/>
           <a:p>
             <a:pPr algn="ctr"/>
+            <a:endParaRPr/>
           </a:p>
         </p:txBody>
       </p:sp>
       <p:sp>
         <p:nvSpPr>
           <p:cNvPr id="4" name="播放三角">
-            <a:hlinkClick r:id="rId3"/>
+            <a:hlinkClick r:id="rId2"/>
           </p:cNvPr>
           <p:cNvSpPr/>
           <p:nvPr/>
@@ -3183,13 +2089,14 @@
           <a:lstStyle/>
           <a:p>
             <a:pPr algn="ctr"/>
+            <a:endParaRPr/>
           </a:p>
         </p:txBody>
       </p:sp>
       <p:sp>
         <p:nvSpPr>
           <p:cNvPr id="5" name="视频文字">
-            <a:hlinkClick r:id="rId3"/>
+            <a:hlinkClick r:id="rId2"/>
           </p:cNvPr>
           <p:cNvSpPr txBox="1"/>
           <p:nvPr/>
